--- a/src/srstudio/assets/poster_templates/legacy/models/CLUBE_EXCLUSIVO_COM_LIMITE.pptx
+++ b/src/srstudio/assets/poster_templates/legacy/models/CLUBE_EXCLUSIVO_COM_LIMITE.pptx
@@ -3402,7 +3402,7 @@
 </file>
 
 <file path=ppt/slides/slide1.xml><?xml version="1.0" encoding="utf-8"?>
-<p:sld xmlns:a="http://schemas.openxmlformats.org/drawingml/2006/main" xmlns:r="http://schemas.openxmlformats.org/officeDocument/2006/relationships" xmlns:p="http://schemas.openxmlformats.org/presentationml/2006/main">
+<p:sld xmlns:a="http://schemas.openxmlformats.org/drawingml/2006/main" xmlns:r="http://schemas.openxmlformats.org/officeDocument/2006/relationships" xmlns:p="http://schemas.openxmlformats.org/presentationml/2006/main" showMasterSp="1">
   <p:cSld>
     <p:spTree>
       <p:nvGrpSpPr>
@@ -3530,7 +3530,7 @@
             </a:extLst>
           </p:cNvPr>
           <p:cNvSpPr>
-            <a:spLocks noChangeArrowheads="1" noChangeShapeType="1"/>
+            <a:spLocks noChangeArrowheads="1" noChangeShapeType="1" noTextEdit="1"/>
           </p:cNvSpPr>
           <p:nvPr/>
         </p:nvSpPr>
@@ -3671,7 +3671,7 @@
           <p:nvPr/>
         </p:nvPicPr>
         <p:blipFill>
-          <a:blip r:embed="rId3">
+          <a:blip r:embed="rIdReference1">
             <a:extLst>
               <a:ext uri="{28A0092B-C50C-407E-A947-70E740481C1C}">
                 <a14:useLocalDpi xmlns:a14="http://schemas.microsoft.com/office/drawing/2010/main" val="0"/>
@@ -3877,7 +3877,7 @@
             </a:extLst>
           </p:cNvPr>
           <p:cNvSpPr>
-            <a:spLocks noChangeArrowheads="1" noChangeShapeType="1"/>
+            <a:spLocks noChangeArrowheads="1" noChangeShapeType="1" noTextEdit="1"/>
           </p:cNvSpPr>
           <p:nvPr/>
         </p:nvSpPr>
@@ -4051,7 +4051,7 @@
                 </a:ln>
                 <a:latin typeface="Algerian" panose="04020705040A02060702" pitchFamily="82" charset="0"/>
               </a:rPr>
-              <a:t>VÁLIDA ATÉ</a:t>
+              <a:t>válida até</a:t>
             </a:r>
           </a:p>
           <a:p>
@@ -4119,7 +4119,7 @@
                 </a:ln>
                 <a:latin typeface="Algerian" panose="04020705040A02060702" pitchFamily="82" charset="0"/>
               </a:rPr>
-              <a:t>OFERTAS</a:t>
+              <a:t>OFERTas</a:t>
             </a:r>
             <a:r>
               <a:rPr lang="pt-BR" sz="3616" kern="10" dirty="0">
@@ -4199,7 +4199,7 @@
             </a:extLst>
           </p:cNvPr>
           <p:cNvSpPr>
-            <a:spLocks noChangeArrowheads="1" noChangeShapeType="1"/>
+            <a:spLocks noChangeArrowheads="1" noChangeShapeType="1" noTextEdit="1"/>
           </p:cNvSpPr>
           <p:nvPr/>
         </p:nvSpPr>
@@ -4235,7 +4235,7 @@
                 </a:ln>
                 <a:latin typeface="Algerian" panose="04020705040A02060702" pitchFamily="82" charset="0"/>
               </a:rPr>
-              <a:t>VÁLIDO</a:t>
+              <a:t>VáliVálida</a:t>
             </a:r>
             <a:r>
               <a:rPr lang="pt-BR" sz="3616" kern="10" dirty="0">
@@ -4459,7 +4459,7 @@
             <p:nvPr/>
           </p:nvPicPr>
           <p:blipFill>
-            <a:blip r:embed="rId4"/>
+            <a:blip r:embed="rIdReference5"/>
             <a:stretch>
               <a:fillRect/>
             </a:stretch>
@@ -4593,7 +4593,7 @@
           <p:nvPr/>
         </p:nvPicPr>
         <p:blipFill>
-          <a:blip r:embed="rId5"/>
+          <a:blip r:embed="rIdReference4"/>
           <a:stretch>
             <a:fillRect/>
           </a:stretch>
